--- a/word_test_project/영단어 프로젝트.pptx
+++ b/word_test_project/영단어 프로젝트.pptx
@@ -108,6 +108,11 @@
       </a:defRPr>
     </a:lvl9pPr>
   </p:defaultTextStyle>
+  <p:extLst>
+    <p:ext uri="{EFAFB233-063F-42B5-8137-9DF3F51BA10A}">
+      <p15:sldGuideLst xmlns:p15="http://schemas.microsoft.com/office/powerpoint/2012/main"/>
+    </p:ext>
+  </p:extLst>
 </p:presentation>
 </file>
 
@@ -281,7 +286,7 @@
             <a:fld id="{87DE6118-2437-4B30-8E3C-4D2BE6020583}" type="datetimeFigureOut">
               <a:rPr lang="en-US" dirty="0"/>
               <a:pPr/>
-              <a:t>2/6/2025</a:t>
+              <a:t>2/7/2025</a:t>
             </a:fld>
             <a:endParaRPr lang="en-US" dirty="0"/>
           </a:p>
@@ -607,7 +612,7 @@
           <a:p>
             <a:fld id="{87DE6118-2437-4B30-8E3C-4D2BE6020583}" type="datetimeFigureOut">
               <a:rPr lang="en-US" dirty="0"/>
-              <a:t>2/6/2025</a:t>
+              <a:t>2/7/2025</a:t>
             </a:fld>
             <a:endParaRPr lang="en-US" dirty="0"/>
           </a:p>
@@ -782,7 +787,7 @@
           <a:p>
             <a:fld id="{87DE6118-2437-4B30-8E3C-4D2BE6020583}" type="datetimeFigureOut">
               <a:rPr lang="en-US" dirty="0"/>
-              <a:t>2/6/2025</a:t>
+              <a:t>2/7/2025</a:t>
             </a:fld>
             <a:endParaRPr lang="en-US" dirty="0"/>
           </a:p>
@@ -947,7 +952,7 @@
           <a:p>
             <a:fld id="{87DE6118-2437-4B30-8E3C-4D2BE6020583}" type="datetimeFigureOut">
               <a:rPr lang="en-US" dirty="0"/>
-              <a:t>2/6/2025</a:t>
+              <a:t>2/7/2025</a:t>
             </a:fld>
             <a:endParaRPr lang="en-US" dirty="0"/>
           </a:p>
@@ -1220,7 +1225,7 @@
             <a:fld id="{87DE6118-2437-4B30-8E3C-4D2BE6020583}" type="datetimeFigureOut">
               <a:rPr lang="en-US" dirty="0"/>
               <a:pPr/>
-              <a:t>2/6/2025</a:t>
+              <a:t>2/7/2025</a:t>
             </a:fld>
             <a:endParaRPr lang="en-US" dirty="0"/>
           </a:p>
@@ -1610,7 +1615,7 @@
           <a:p>
             <a:fld id="{87DE6118-2437-4B30-8E3C-4D2BE6020583}" type="datetimeFigureOut">
               <a:rPr lang="en-US" dirty="0"/>
-              <a:t>2/6/2025</a:t>
+              <a:t>2/7/2025</a:t>
             </a:fld>
             <a:endParaRPr lang="en-US" dirty="0"/>
           </a:p>
@@ -2082,7 +2087,7 @@
           <a:p>
             <a:fld id="{87DE6118-2437-4B30-8E3C-4D2BE6020583}" type="datetimeFigureOut">
               <a:rPr lang="en-US" dirty="0"/>
-              <a:t>2/6/2025</a:t>
+              <a:t>2/7/2025</a:t>
             </a:fld>
             <a:endParaRPr lang="en-US" dirty="0"/>
           </a:p>
@@ -2195,7 +2200,7 @@
           <a:p>
             <a:fld id="{87DE6118-2437-4B30-8E3C-4D2BE6020583}" type="datetimeFigureOut">
               <a:rPr lang="en-US" dirty="0"/>
-              <a:t>2/6/2025</a:t>
+              <a:t>2/7/2025</a:t>
             </a:fld>
             <a:endParaRPr lang="en-US" dirty="0"/>
           </a:p>
@@ -2285,7 +2290,7 @@
           <a:p>
             <a:fld id="{87DE6118-2437-4B30-8E3C-4D2BE6020583}" type="datetimeFigureOut">
               <a:rPr lang="en-US" dirty="0"/>
-              <a:t>2/6/2025</a:t>
+              <a:t>2/7/2025</a:t>
             </a:fld>
             <a:endParaRPr lang="en-US" dirty="0"/>
           </a:p>
@@ -2627,7 +2632,7 @@
             <a:fld id="{87DE6118-2437-4B30-8E3C-4D2BE6020583}" type="datetimeFigureOut">
               <a:rPr lang="en-US" dirty="0"/>
               <a:pPr/>
-              <a:t>2/6/2025</a:t>
+              <a:t>2/7/2025</a:t>
             </a:fld>
             <a:endParaRPr lang="en-US" dirty="0"/>
           </a:p>
@@ -3012,7 +3017,7 @@
             <a:fld id="{87DE6118-2437-4B30-8E3C-4D2BE6020583}" type="datetimeFigureOut">
               <a:rPr lang="en-US" dirty="0"/>
               <a:pPr/>
-              <a:t>2/6/2025</a:t>
+              <a:t>2/7/2025</a:t>
             </a:fld>
             <a:endParaRPr lang="en-US" dirty="0"/>
           </a:p>
@@ -3287,7 +3292,7 @@
             <a:fld id="{87DE6118-2437-4B30-8E3C-4D2BE6020583}" type="datetimeFigureOut">
               <a:rPr lang="en-US" dirty="0"/>
               <a:pPr/>
-              <a:t>2/6/2025</a:t>
+              <a:t>2/7/2025</a:t>
             </a:fld>
             <a:endParaRPr lang="en-US" dirty="0"/>
           </a:p>
@@ -3908,7 +3913,7 @@
         </p:nvSpPr>
         <p:spPr>
           <a:xfrm>
-            <a:off x="1371600" y="990600"/>
+            <a:off x="1298448" y="777266"/>
             <a:ext cx="5207330" cy="774865"/>
           </a:xfrm>
         </p:spPr>
